--- a/praesentation-hamburg-in-zahlen-2026-09-11.pptx
+++ b/praesentation-hamburg-in-zahlen-2026-09-11.pptx
@@ -24,11 +24,13 @@
     <p:sldId id="272" r:id="rId18"/>
     <p:sldId id="273" r:id="rId19"/>
     <p:sldId id="274" r:id="rId20"/>
-    <p:sldId id="275" r:id="rId21"/>
-    <p:sldId id="276" r:id="rId22"/>
-    <p:sldId id="277" r:id="rId23"/>
-    <p:sldId id="278" r:id="rId24"/>
-    <p:sldId id="279" r:id="rId25"/>
+    <p:sldId id="279" r:id="rId21"/>
+    <p:sldId id="280" r:id="rId22"/>
+    <p:sldId id="282" r:id="rId23"/>
+    <p:sldId id="281" r:id="rId24"/>
+    <p:sldId id="276" r:id="rId25"/>
+    <p:sldId id="277" r:id="rId26"/>
+    <p:sldId id="278" r:id="rId27"/>
   </p:sldIdLst>
   <p:sldSz cx="12192000" cy="6858000"/>
   <p:notesSz cx="6858000" cy="9144000"/>
@@ -7628,30 +7630,174 @@
           <a:p>
             <a:pPr algn="l"/>
             <a:r>
-              <a:rPr sz="1200">
+              <a:rPr sz="1200" dirty="0" err="1">
                 <a:solidFill>
                   <a:srgbClr val="E6EDF3"/>
                 </a:solidFill>
                 <a:latin typeface="Consolas"/>
               </a:rPr>
-              <a:t>maske_vr = jahr.loc[:, "Zuwendungsempfänger"] == "Vereinsregister"</a:t>
+              <a:t>maske_vr</a:t>
+            </a:r>
+            <a:r>
+              <a:rPr sz="1200" dirty="0">
+                <a:solidFill>
+                  <a:srgbClr val="E6EDF3"/>
+                </a:solidFill>
+                <a:latin typeface="Consolas"/>
+              </a:rPr>
+              <a:t> = </a:t>
+            </a:r>
+            <a:r>
+              <a:rPr sz="1200" dirty="0" err="1">
+                <a:solidFill>
+                  <a:srgbClr val="E6EDF3"/>
+                </a:solidFill>
+                <a:latin typeface="Consolas"/>
+              </a:rPr>
+              <a:t>jahr.loc</a:t>
+            </a:r>
+            <a:r>
+              <a:rPr sz="1200" dirty="0">
+                <a:solidFill>
+                  <a:srgbClr val="E6EDF3"/>
+                </a:solidFill>
+                <a:latin typeface="Consolas"/>
+              </a:rPr>
+              <a:t>[:, "</a:t>
+            </a:r>
+            <a:r>
+              <a:rPr sz="1200" dirty="0" err="1">
+                <a:solidFill>
+                  <a:srgbClr val="E6EDF3"/>
+                </a:solidFill>
+                <a:latin typeface="Consolas"/>
+              </a:rPr>
+              <a:t>Zuwendungsempfänger</a:t>
+            </a:r>
+            <a:r>
+              <a:rPr sz="1200" dirty="0">
+                <a:solidFill>
+                  <a:srgbClr val="E6EDF3"/>
+                </a:solidFill>
+                <a:latin typeface="Consolas"/>
+              </a:rPr>
+              <a:t>"] == "</a:t>
+            </a:r>
+            <a:r>
+              <a:rPr sz="1200" dirty="0" err="1">
+                <a:solidFill>
+                  <a:srgbClr val="E6EDF3"/>
+                </a:solidFill>
+                <a:latin typeface="Consolas"/>
+              </a:rPr>
+              <a:t>Vereinsregister</a:t>
+            </a:r>
+            <a:r>
+              <a:rPr sz="1200" dirty="0">
+                <a:solidFill>
+                  <a:srgbClr val="E6EDF3"/>
+                </a:solidFill>
+                <a:latin typeface="Consolas"/>
+              </a:rPr>
+              <a:t>"</a:t>
             </a:r>
           </a:p>
           <a:p>
             <a:pPr algn="l"/>
             <a:r>
-              <a:rPr sz="1200">
+              <a:rPr sz="1200" dirty="0" err="1">
                 <a:solidFill>
                   <a:srgbClr val="E6EDF3"/>
                 </a:solidFill>
                 <a:latin typeface="Consolas"/>
               </a:rPr>
-              <a:t>jahr.loc[maske_vr, ["Zuwendungszweck", "Behörde", "netto"]]</a:t>
+              <a:t>jahr.loc</a:t>
+            </a:r>
+            <a:r>
+              <a:rPr sz="1200" dirty="0">
+                <a:solidFill>
+                  <a:srgbClr val="E6EDF3"/>
+                </a:solidFill>
+                <a:latin typeface="Consolas"/>
+              </a:rPr>
+              <a:t>[</a:t>
+            </a:r>
+            <a:r>
+              <a:rPr sz="1200" dirty="0" err="1">
+                <a:solidFill>
+                  <a:srgbClr val="E6EDF3"/>
+                </a:solidFill>
+                <a:latin typeface="Consolas"/>
+              </a:rPr>
+              <a:t>maske_vr</a:t>
+            </a:r>
+            <a:r>
+              <a:rPr sz="1200" dirty="0">
+                <a:solidFill>
+                  <a:srgbClr val="E6EDF3"/>
+                </a:solidFill>
+                <a:latin typeface="Consolas"/>
+              </a:rPr>
+              <a:t>, ["</a:t>
+            </a:r>
+            <a:r>
+              <a:rPr sz="1200" dirty="0" err="1">
+                <a:solidFill>
+                  <a:srgbClr val="E6EDF3"/>
+                </a:solidFill>
+                <a:latin typeface="Consolas"/>
+              </a:rPr>
+              <a:t>Zuwendungszweck</a:t>
+            </a:r>
+            <a:r>
+              <a:rPr sz="1200" dirty="0">
+                <a:solidFill>
+                  <a:srgbClr val="E6EDF3"/>
+                </a:solidFill>
+                <a:latin typeface="Consolas"/>
+              </a:rPr>
+              <a:t>", "</a:t>
+            </a:r>
+            <a:r>
+              <a:rPr sz="1200" dirty="0" err="1">
+                <a:solidFill>
+                  <a:srgbClr val="E6EDF3"/>
+                </a:solidFill>
+                <a:latin typeface="Consolas"/>
+              </a:rPr>
+              <a:t>Behörde</a:t>
+            </a:r>
+            <a:r>
+              <a:rPr sz="1200" dirty="0">
+                <a:solidFill>
+                  <a:srgbClr val="E6EDF3"/>
+                </a:solidFill>
+                <a:latin typeface="Consolas"/>
+              </a:rPr>
+              <a:t>", "</a:t>
+            </a:r>
+            <a:r>
+              <a:rPr sz="1200" dirty="0" err="1">
+                <a:solidFill>
+                  <a:srgbClr val="E6EDF3"/>
+                </a:solidFill>
+                <a:latin typeface="Consolas"/>
+              </a:rPr>
+              <a:t>netto</a:t>
+            </a:r>
+            <a:r>
+              <a:rPr sz="1200" dirty="0">
+                <a:solidFill>
+                  <a:srgbClr val="E6EDF3"/>
+                </a:solidFill>
+                <a:latin typeface="Consolas"/>
+              </a:rPr>
+              <a:t>"]]</a:t>
             </a:r>
           </a:p>
           <a:p>
             <a:pPr algn="l"/>
-            <a:endParaRPr sz="1200">
+            <a:endParaRPr sz="1200" dirty="0">
               <a:solidFill>
                 <a:srgbClr val="E6EDF3"/>
               </a:solidFill>
@@ -7661,25 +7807,124 @@
           <a:p>
             <a:pPr algn="l"/>
             <a:r>
-              <a:rPr sz="1200">
+              <a:rPr sz="1200" dirty="0" err="1">
                 <a:solidFill>
                   <a:srgbClr val="E6EDF3"/>
                 </a:solidFill>
                 <a:latin typeface="Consolas"/>
               </a:rPr>
-              <a:t>jahr.loc[maske_vr, "Zuwendungsempfänger"] = (</a:t>
+              <a:t>jahr.loc</a:t>
+            </a:r>
+            <a:r>
+              <a:rPr sz="1200" dirty="0">
+                <a:solidFill>
+                  <a:srgbClr val="E6EDF3"/>
+                </a:solidFill>
+                <a:latin typeface="Consolas"/>
+              </a:rPr>
+              <a:t>[</a:t>
+            </a:r>
+            <a:r>
+              <a:rPr sz="1200" dirty="0" err="1">
+                <a:solidFill>
+                  <a:srgbClr val="E6EDF3"/>
+                </a:solidFill>
+                <a:latin typeface="Consolas"/>
+              </a:rPr>
+              <a:t>maske_vr</a:t>
+            </a:r>
+            <a:r>
+              <a:rPr sz="1200" dirty="0">
+                <a:solidFill>
+                  <a:srgbClr val="E6EDF3"/>
+                </a:solidFill>
+                <a:latin typeface="Consolas"/>
+              </a:rPr>
+              <a:t>, "</a:t>
+            </a:r>
+            <a:r>
+              <a:rPr sz="1200" dirty="0" err="1">
+                <a:solidFill>
+                  <a:srgbClr val="E6EDF3"/>
+                </a:solidFill>
+                <a:latin typeface="Consolas"/>
+              </a:rPr>
+              <a:t>Zuwendungsempfänger</a:t>
+            </a:r>
+            <a:r>
+              <a:rPr sz="1200" dirty="0">
+                <a:solidFill>
+                  <a:srgbClr val="E6EDF3"/>
+                </a:solidFill>
+                <a:latin typeface="Consolas"/>
+              </a:rPr>
+              <a:t>"] = (</a:t>
             </a:r>
           </a:p>
           <a:p>
             <a:pPr algn="l"/>
             <a:r>
-              <a:rPr sz="1200">
+              <a:rPr sz="1200" dirty="0">
                 <a:solidFill>
                   <a:srgbClr val="E6EDF3"/>
                 </a:solidFill>
                 <a:latin typeface="Consolas"/>
               </a:rPr>
-              <a:t>    "Vereinsregister " + jahr.loc[maske_vr, "INEZ-Nummer"])</a:t>
+              <a:t>    "</a:t>
+            </a:r>
+            <a:r>
+              <a:rPr sz="1200" dirty="0" err="1">
+                <a:solidFill>
+                  <a:srgbClr val="E6EDF3"/>
+                </a:solidFill>
+                <a:latin typeface="Consolas"/>
+              </a:rPr>
+              <a:t>Vereinsregister</a:t>
+            </a:r>
+            <a:r>
+              <a:rPr sz="1200" dirty="0">
+                <a:solidFill>
+                  <a:srgbClr val="E6EDF3"/>
+                </a:solidFill>
+                <a:latin typeface="Consolas"/>
+              </a:rPr>
+              <a:t> " + </a:t>
+            </a:r>
+            <a:r>
+              <a:rPr sz="1200" dirty="0" err="1">
+                <a:solidFill>
+                  <a:srgbClr val="E6EDF3"/>
+                </a:solidFill>
+                <a:latin typeface="Consolas"/>
+              </a:rPr>
+              <a:t>jahr.loc</a:t>
+            </a:r>
+            <a:r>
+              <a:rPr sz="1200" dirty="0">
+                <a:solidFill>
+                  <a:srgbClr val="E6EDF3"/>
+                </a:solidFill>
+                <a:latin typeface="Consolas"/>
+              </a:rPr>
+              <a:t>[</a:t>
+            </a:r>
+            <a:r>
+              <a:rPr sz="1200" dirty="0" err="1">
+                <a:solidFill>
+                  <a:srgbClr val="E6EDF3"/>
+                </a:solidFill>
+                <a:latin typeface="Consolas"/>
+              </a:rPr>
+              <a:t>maske_vr</a:t>
+            </a:r>
+            <a:r>
+              <a:rPr sz="1200" dirty="0">
+                <a:solidFill>
+                  <a:srgbClr val="E6EDF3"/>
+                </a:solidFill>
+                <a:latin typeface="Consolas"/>
+              </a:rPr>
+              <a:t>, "INEZ-Nummer"])</a:t>
             </a:r>
           </a:p>
         </p:txBody>
@@ -7814,7 +8059,7 @@
               <a:t> 0,3</a:t>
             </a:r>
             <a:r>
-              <a:rPr lang="de-DE" sz="1300" b="0">
+              <a:rPr lang="de-DE" sz="1300" b="0" dirty="0">
                 <a:solidFill>
                   <a:srgbClr val="55677A"/>
                 </a:solidFill>
@@ -7823,22 +8068,13 @@
               <a:t>6</a:t>
             </a:r>
             <a:r>
-              <a:rPr sz="1300" b="0">
-                <a:solidFill>
-                  <a:srgbClr val="55677A"/>
-                </a:solidFill>
-                <a:latin typeface="Arial"/>
-              </a:rPr>
-              <a:t> % der Summe. </a:t>
-            </a:r>
-            <a:r>
               <a:rPr sz="1300" b="0" dirty="0">
                 <a:solidFill>
                   <a:srgbClr val="55677A"/>
                 </a:solidFill>
                 <a:latin typeface="Arial"/>
               </a:rPr>
-              <a:t>Selbst </a:t>
+              <a:t> % der Summe. Selbst </a:t>
             </a:r>
             <a:r>
               <a:rPr sz="1300" b="0" dirty="0" err="1">
@@ -9213,7 +9449,7 @@
         </p:nvSpPr>
         <p:spPr>
           <a:xfrm>
-            <a:off x="5943600" y="2148840"/>
+            <a:off x="6002215" y="2194560"/>
             <a:ext cx="5608015" cy="2286000"/>
           </a:xfrm>
           <a:prstGeom prst="rect">
@@ -11947,7 +12183,7 @@
                     <a:p>
                       <a:pPr algn="r"/>
                       <a:r>
-                        <a:rPr sz="1300" b="0">
+                        <a:rPr sz="1300" b="0" dirty="0">
                           <a:solidFill>
                             <a:srgbClr val="16202A"/>
                           </a:solidFill>
@@ -12051,7 +12287,7 @@
                     <a:p>
                       <a:pPr algn="r"/>
                       <a:r>
-                        <a:rPr sz="1300" b="0">
+                        <a:rPr sz="1300" b="0" dirty="0">
                           <a:solidFill>
                             <a:srgbClr val="16202A"/>
                           </a:solidFill>
@@ -12558,13 +12794,202 @@
               </a:lnSpc>
             </a:pPr>
             <a:r>
-              <a:rPr sz="1200" b="0">
-                <a:solidFill>
-                  <a:srgbClr val="55677A"/>
-                </a:solidFill>
-                <a:latin typeface="Arial"/>
-              </a:rPr>
-              <a:t>Geprüft sind 50 von 1.913 Empfängern. 80,3 % ist eine Untergrenze für den städtischen Anteil, 18,4 % eine Obergrenze für den freien.</a:t>
+              <a:rPr sz="1200" b="0" dirty="0" err="1">
+                <a:solidFill>
+                  <a:srgbClr val="55677A"/>
+                </a:solidFill>
+                <a:latin typeface="Arial"/>
+              </a:rPr>
+              <a:t>Geprüft</a:t>
+            </a:r>
+            <a:r>
+              <a:rPr sz="1200" b="0" dirty="0">
+                <a:solidFill>
+                  <a:srgbClr val="55677A"/>
+                </a:solidFill>
+                <a:latin typeface="Arial"/>
+              </a:rPr>
+              <a:t> </a:t>
+            </a:r>
+            <a:r>
+              <a:rPr sz="1200" b="0" dirty="0" err="1">
+                <a:solidFill>
+                  <a:srgbClr val="55677A"/>
+                </a:solidFill>
+                <a:latin typeface="Arial"/>
+              </a:rPr>
+              <a:t>sind</a:t>
+            </a:r>
+            <a:r>
+              <a:rPr sz="1200" b="0" dirty="0">
+                <a:solidFill>
+                  <a:srgbClr val="55677A"/>
+                </a:solidFill>
+                <a:latin typeface="Arial"/>
+              </a:rPr>
+              <a:t> 50 von 1.913 </a:t>
+            </a:r>
+            <a:r>
+              <a:rPr sz="1200" b="0" dirty="0" err="1">
+                <a:solidFill>
+                  <a:srgbClr val="55677A"/>
+                </a:solidFill>
+                <a:latin typeface="Arial"/>
+              </a:rPr>
+              <a:t>Empfängern</a:t>
+            </a:r>
+            <a:r>
+              <a:rPr sz="1200" b="0" dirty="0">
+                <a:solidFill>
+                  <a:srgbClr val="55677A"/>
+                </a:solidFill>
+                <a:latin typeface="Arial"/>
+              </a:rPr>
+              <a:t>. 80,3 % </a:t>
+            </a:r>
+            <a:r>
+              <a:rPr sz="1200" b="0" dirty="0" err="1">
+                <a:solidFill>
+                  <a:srgbClr val="55677A"/>
+                </a:solidFill>
+                <a:latin typeface="Arial"/>
+              </a:rPr>
+              <a:t>ist</a:t>
+            </a:r>
+            <a:r>
+              <a:rPr sz="1200" b="0" dirty="0">
+                <a:solidFill>
+                  <a:srgbClr val="55677A"/>
+                </a:solidFill>
+                <a:latin typeface="Arial"/>
+              </a:rPr>
+              <a:t> </a:t>
+            </a:r>
+            <a:r>
+              <a:rPr sz="1200" b="0" dirty="0" err="1">
+                <a:solidFill>
+                  <a:srgbClr val="55677A"/>
+                </a:solidFill>
+                <a:latin typeface="Arial"/>
+              </a:rPr>
+              <a:t>eine</a:t>
+            </a:r>
+            <a:r>
+              <a:rPr sz="1200" b="0" dirty="0">
+                <a:solidFill>
+                  <a:srgbClr val="55677A"/>
+                </a:solidFill>
+                <a:latin typeface="Arial"/>
+              </a:rPr>
+              <a:t> </a:t>
+            </a:r>
+            <a:r>
+              <a:rPr sz="1200" b="0" dirty="0" err="1">
+                <a:solidFill>
+                  <a:srgbClr val="55677A"/>
+                </a:solidFill>
+                <a:latin typeface="Arial"/>
+              </a:rPr>
+              <a:t>Untergrenze</a:t>
+            </a:r>
+            <a:r>
+              <a:rPr sz="1200" b="0" dirty="0">
+                <a:solidFill>
+                  <a:srgbClr val="55677A"/>
+                </a:solidFill>
+                <a:latin typeface="Arial"/>
+              </a:rPr>
+              <a:t> für den </a:t>
+            </a:r>
+            <a:r>
+              <a:rPr sz="1200" b="0" dirty="0" err="1">
+                <a:solidFill>
+                  <a:srgbClr val="55677A"/>
+                </a:solidFill>
+                <a:latin typeface="Arial"/>
+              </a:rPr>
+              <a:t>städtischen</a:t>
+            </a:r>
+            <a:r>
+              <a:rPr sz="1200" b="0" dirty="0">
+                <a:solidFill>
+                  <a:srgbClr val="55677A"/>
+                </a:solidFill>
+                <a:latin typeface="Arial"/>
+              </a:rPr>
+              <a:t> </a:t>
+            </a:r>
+            <a:r>
+              <a:rPr sz="1200" b="0" dirty="0" err="1">
+                <a:solidFill>
+                  <a:srgbClr val="55677A"/>
+                </a:solidFill>
+                <a:latin typeface="Arial"/>
+              </a:rPr>
+              <a:t>Anteil</a:t>
+            </a:r>
+            <a:r>
+              <a:rPr sz="1200" b="0" dirty="0">
+                <a:solidFill>
+                  <a:srgbClr val="55677A"/>
+                </a:solidFill>
+                <a:latin typeface="Arial"/>
+              </a:rPr>
+              <a:t>, 18,4 % </a:t>
+            </a:r>
+            <a:r>
+              <a:rPr sz="1200" b="0" dirty="0" err="1">
+                <a:solidFill>
+                  <a:srgbClr val="55677A"/>
+                </a:solidFill>
+                <a:latin typeface="Arial"/>
+              </a:rPr>
+              <a:t>eine</a:t>
+            </a:r>
+            <a:r>
+              <a:rPr sz="1200" b="0" dirty="0">
+                <a:solidFill>
+                  <a:srgbClr val="55677A"/>
+                </a:solidFill>
+                <a:latin typeface="Arial"/>
+              </a:rPr>
+              <a:t> </a:t>
+            </a:r>
+            <a:r>
+              <a:rPr sz="1200" b="0" dirty="0" err="1">
+                <a:solidFill>
+                  <a:srgbClr val="55677A"/>
+                </a:solidFill>
+                <a:latin typeface="Arial"/>
+              </a:rPr>
+              <a:t>Obergrenze</a:t>
+            </a:r>
+            <a:r>
+              <a:rPr sz="1200" b="0" dirty="0">
+                <a:solidFill>
+                  <a:srgbClr val="55677A"/>
+                </a:solidFill>
+                <a:latin typeface="Arial"/>
+              </a:rPr>
+              <a:t> für den </a:t>
+            </a:r>
+            <a:r>
+              <a:rPr sz="1200" b="0" dirty="0" err="1">
+                <a:solidFill>
+                  <a:srgbClr val="55677A"/>
+                </a:solidFill>
+                <a:latin typeface="Arial"/>
+              </a:rPr>
+              <a:t>freien</a:t>
+            </a:r>
+            <a:r>
+              <a:rPr sz="1200" b="0" dirty="0">
+                <a:solidFill>
+                  <a:srgbClr val="55677A"/>
+                </a:solidFill>
+                <a:latin typeface="Arial"/>
+              </a:rPr>
+              <a:t>.</a:t>
             </a:r>
           </a:p>
         </p:txBody>
@@ -13679,13 +14104,373 @@
               </a:lnSpc>
             </a:pPr>
             <a:r>
-              <a:rPr sz="1200" b="0">
-                <a:solidFill>
-                  <a:srgbClr val="55677A"/>
-                </a:solidFill>
-                <a:latin typeface="Arial"/>
-              </a:rPr>
-              <a:t>„Müller“ und „Muller“ bekämen denselben Schlüssel. In diesem Datensatz nicht aufgetreten, bleibt aber eine Grenze des Verfahrens. Rechtsform-Varianten wie „AG“ und „Aktiengesellschaft“ führt er nicht zusammen, dafür ein gezielter Check auf die zehn größten Namen.</a:t>
+              <a:rPr sz="1200" b="0" dirty="0">
+                <a:solidFill>
+                  <a:srgbClr val="55677A"/>
+                </a:solidFill>
+                <a:latin typeface="Arial"/>
+              </a:rPr>
+              <a:t>„Müller“ und „Muller“ </a:t>
+            </a:r>
+            <a:r>
+              <a:rPr sz="1200" b="0" dirty="0" err="1">
+                <a:solidFill>
+                  <a:srgbClr val="55677A"/>
+                </a:solidFill>
+                <a:latin typeface="Arial"/>
+              </a:rPr>
+              <a:t>bekämen</a:t>
+            </a:r>
+            <a:r>
+              <a:rPr sz="1200" b="0" dirty="0">
+                <a:solidFill>
+                  <a:srgbClr val="55677A"/>
+                </a:solidFill>
+                <a:latin typeface="Arial"/>
+              </a:rPr>
+              <a:t> </a:t>
+            </a:r>
+            <a:r>
+              <a:rPr sz="1200" b="0" dirty="0" err="1">
+                <a:solidFill>
+                  <a:srgbClr val="55677A"/>
+                </a:solidFill>
+                <a:latin typeface="Arial"/>
+              </a:rPr>
+              <a:t>denselben</a:t>
+            </a:r>
+            <a:r>
+              <a:rPr sz="1200" b="0" dirty="0">
+                <a:solidFill>
+                  <a:srgbClr val="55677A"/>
+                </a:solidFill>
+                <a:latin typeface="Arial"/>
+              </a:rPr>
+              <a:t> </a:t>
+            </a:r>
+            <a:r>
+              <a:rPr sz="1200" b="0" dirty="0" err="1">
+                <a:solidFill>
+                  <a:srgbClr val="55677A"/>
+                </a:solidFill>
+                <a:latin typeface="Arial"/>
+              </a:rPr>
+              <a:t>Schlüssel</a:t>
+            </a:r>
+            <a:r>
+              <a:rPr sz="1200" b="0" dirty="0">
+                <a:solidFill>
+                  <a:srgbClr val="55677A"/>
+                </a:solidFill>
+                <a:latin typeface="Arial"/>
+              </a:rPr>
+              <a:t>. In </a:t>
+            </a:r>
+            <a:r>
+              <a:rPr sz="1200" b="0" dirty="0" err="1">
+                <a:solidFill>
+                  <a:srgbClr val="55677A"/>
+                </a:solidFill>
+                <a:latin typeface="Arial"/>
+              </a:rPr>
+              <a:t>diesem</a:t>
+            </a:r>
+            <a:r>
+              <a:rPr sz="1200" b="0" dirty="0">
+                <a:solidFill>
+                  <a:srgbClr val="55677A"/>
+                </a:solidFill>
+                <a:latin typeface="Arial"/>
+              </a:rPr>
+              <a:t> </a:t>
+            </a:r>
+            <a:r>
+              <a:rPr sz="1200" b="0" dirty="0" err="1">
+                <a:solidFill>
+                  <a:srgbClr val="55677A"/>
+                </a:solidFill>
+                <a:latin typeface="Arial"/>
+              </a:rPr>
+              <a:t>Datensatz</a:t>
+            </a:r>
+            <a:r>
+              <a:rPr sz="1200" b="0" dirty="0">
+                <a:solidFill>
+                  <a:srgbClr val="55677A"/>
+                </a:solidFill>
+                <a:latin typeface="Arial"/>
+              </a:rPr>
+              <a:t> nicht </a:t>
+            </a:r>
+            <a:r>
+              <a:rPr sz="1200" b="0" dirty="0" err="1">
+                <a:solidFill>
+                  <a:srgbClr val="55677A"/>
+                </a:solidFill>
+                <a:latin typeface="Arial"/>
+              </a:rPr>
+              <a:t>aufgetreten</a:t>
+            </a:r>
+            <a:r>
+              <a:rPr sz="1200" b="0" dirty="0">
+                <a:solidFill>
+                  <a:srgbClr val="55677A"/>
+                </a:solidFill>
+                <a:latin typeface="Arial"/>
+              </a:rPr>
+              <a:t>, </a:t>
+            </a:r>
+            <a:r>
+              <a:rPr sz="1200" b="0" dirty="0" err="1">
+                <a:solidFill>
+                  <a:srgbClr val="55677A"/>
+                </a:solidFill>
+                <a:latin typeface="Arial"/>
+              </a:rPr>
+              <a:t>bleibt</a:t>
+            </a:r>
+            <a:r>
+              <a:rPr sz="1200" b="0" dirty="0">
+                <a:solidFill>
+                  <a:srgbClr val="55677A"/>
+                </a:solidFill>
+                <a:latin typeface="Arial"/>
+              </a:rPr>
+              <a:t> </a:t>
+            </a:r>
+            <a:r>
+              <a:rPr sz="1200" b="0" dirty="0" err="1">
+                <a:solidFill>
+                  <a:srgbClr val="55677A"/>
+                </a:solidFill>
+                <a:latin typeface="Arial"/>
+              </a:rPr>
+              <a:t>aber</a:t>
+            </a:r>
+            <a:r>
+              <a:rPr sz="1200" b="0" dirty="0">
+                <a:solidFill>
+                  <a:srgbClr val="55677A"/>
+                </a:solidFill>
+                <a:latin typeface="Arial"/>
+              </a:rPr>
+              <a:t> </a:t>
+            </a:r>
+            <a:r>
+              <a:rPr sz="1200" b="0" dirty="0" err="1">
+                <a:solidFill>
+                  <a:srgbClr val="55677A"/>
+                </a:solidFill>
+                <a:latin typeface="Arial"/>
+              </a:rPr>
+              <a:t>eine</a:t>
+            </a:r>
+            <a:r>
+              <a:rPr sz="1200" b="0" dirty="0">
+                <a:solidFill>
+                  <a:srgbClr val="55677A"/>
+                </a:solidFill>
+                <a:latin typeface="Arial"/>
+              </a:rPr>
+              <a:t> </a:t>
+            </a:r>
+            <a:r>
+              <a:rPr sz="1200" b="0" dirty="0" err="1">
+                <a:solidFill>
+                  <a:srgbClr val="55677A"/>
+                </a:solidFill>
+                <a:latin typeface="Arial"/>
+              </a:rPr>
+              <a:t>Grenze</a:t>
+            </a:r>
+            <a:r>
+              <a:rPr sz="1200" b="0" dirty="0">
+                <a:solidFill>
+                  <a:srgbClr val="55677A"/>
+                </a:solidFill>
+                <a:latin typeface="Arial"/>
+              </a:rPr>
+              <a:t> des </a:t>
+            </a:r>
+            <a:r>
+              <a:rPr sz="1200" b="0" dirty="0" err="1">
+                <a:solidFill>
+                  <a:srgbClr val="55677A"/>
+                </a:solidFill>
+                <a:latin typeface="Arial"/>
+              </a:rPr>
+              <a:t>Verfahrens</a:t>
+            </a:r>
+            <a:r>
+              <a:rPr sz="1200" b="0" dirty="0">
+                <a:solidFill>
+                  <a:srgbClr val="55677A"/>
+                </a:solidFill>
+                <a:latin typeface="Arial"/>
+              </a:rPr>
+              <a:t>. </a:t>
+            </a:r>
+            <a:r>
+              <a:rPr sz="1200" b="0" dirty="0" err="1">
+                <a:solidFill>
+                  <a:srgbClr val="55677A"/>
+                </a:solidFill>
+                <a:latin typeface="Arial"/>
+              </a:rPr>
+              <a:t>Rechtsform-Varianten</a:t>
+            </a:r>
+            <a:r>
+              <a:rPr sz="1200" b="0" dirty="0">
+                <a:solidFill>
+                  <a:srgbClr val="55677A"/>
+                </a:solidFill>
+                <a:latin typeface="Arial"/>
+              </a:rPr>
+              <a:t> </a:t>
+            </a:r>
+            <a:r>
+              <a:rPr sz="1200" b="0" dirty="0" err="1">
+                <a:solidFill>
+                  <a:srgbClr val="55677A"/>
+                </a:solidFill>
+                <a:latin typeface="Arial"/>
+              </a:rPr>
+              <a:t>wie</a:t>
+            </a:r>
+            <a:r>
+              <a:rPr sz="1200" b="0" dirty="0">
+                <a:solidFill>
+                  <a:srgbClr val="55677A"/>
+                </a:solidFill>
+                <a:latin typeface="Arial"/>
+              </a:rPr>
+              <a:t> „AG“ und „Aktiengesellschaft“ </a:t>
+            </a:r>
+            <a:r>
+              <a:rPr sz="1200" b="0" dirty="0" err="1">
+                <a:solidFill>
+                  <a:srgbClr val="55677A"/>
+                </a:solidFill>
+                <a:latin typeface="Arial"/>
+              </a:rPr>
+              <a:t>führt</a:t>
+            </a:r>
+            <a:r>
+              <a:rPr sz="1200" b="0" dirty="0">
+                <a:solidFill>
+                  <a:srgbClr val="55677A"/>
+                </a:solidFill>
+                <a:latin typeface="Arial"/>
+              </a:rPr>
+              <a:t> er nicht </a:t>
+            </a:r>
+            <a:r>
+              <a:rPr sz="1200" b="0" dirty="0" err="1">
+                <a:solidFill>
+                  <a:srgbClr val="55677A"/>
+                </a:solidFill>
+                <a:latin typeface="Arial"/>
+              </a:rPr>
+              <a:t>zusammen</a:t>
+            </a:r>
+            <a:r>
+              <a:rPr sz="1200" b="0" dirty="0">
+                <a:solidFill>
+                  <a:srgbClr val="55677A"/>
+                </a:solidFill>
+                <a:latin typeface="Arial"/>
+              </a:rPr>
+              <a:t>, </a:t>
+            </a:r>
+            <a:r>
+              <a:rPr sz="1200" b="0" dirty="0" err="1">
+                <a:solidFill>
+                  <a:srgbClr val="55677A"/>
+                </a:solidFill>
+                <a:latin typeface="Arial"/>
+              </a:rPr>
+              <a:t>dafür</a:t>
+            </a:r>
+            <a:r>
+              <a:rPr sz="1200" b="0" dirty="0">
+                <a:solidFill>
+                  <a:srgbClr val="55677A"/>
+                </a:solidFill>
+                <a:latin typeface="Arial"/>
+              </a:rPr>
+              <a:t> </a:t>
+            </a:r>
+            <a:r>
+              <a:rPr sz="1200" b="0" dirty="0" err="1">
+                <a:solidFill>
+                  <a:srgbClr val="55677A"/>
+                </a:solidFill>
+                <a:latin typeface="Arial"/>
+              </a:rPr>
+              <a:t>ein</a:t>
+            </a:r>
+            <a:r>
+              <a:rPr sz="1200" b="0" dirty="0">
+                <a:solidFill>
+                  <a:srgbClr val="55677A"/>
+                </a:solidFill>
+                <a:latin typeface="Arial"/>
+              </a:rPr>
+              <a:t> </a:t>
+            </a:r>
+            <a:r>
+              <a:rPr sz="1200" b="0" dirty="0" err="1">
+                <a:solidFill>
+                  <a:srgbClr val="55677A"/>
+                </a:solidFill>
+                <a:latin typeface="Arial"/>
+              </a:rPr>
+              <a:t>gezielter</a:t>
+            </a:r>
+            <a:r>
+              <a:rPr sz="1200" b="0" dirty="0">
+                <a:solidFill>
+                  <a:srgbClr val="55677A"/>
+                </a:solidFill>
+                <a:latin typeface="Arial"/>
+              </a:rPr>
+              <a:t> Check auf die </a:t>
+            </a:r>
+            <a:r>
+              <a:rPr sz="1200" b="0" dirty="0" err="1">
+                <a:solidFill>
+                  <a:srgbClr val="55677A"/>
+                </a:solidFill>
+                <a:latin typeface="Arial"/>
+              </a:rPr>
+              <a:t>zehn</a:t>
+            </a:r>
+            <a:r>
+              <a:rPr sz="1200" b="0" dirty="0">
+                <a:solidFill>
+                  <a:srgbClr val="55677A"/>
+                </a:solidFill>
+                <a:latin typeface="Arial"/>
+              </a:rPr>
+              <a:t> </a:t>
+            </a:r>
+            <a:r>
+              <a:rPr sz="1200" b="0" dirty="0" err="1">
+                <a:solidFill>
+                  <a:srgbClr val="55677A"/>
+                </a:solidFill>
+                <a:latin typeface="Arial"/>
+              </a:rPr>
+              <a:t>größten</a:t>
+            </a:r>
+            <a:r>
+              <a:rPr sz="1200" b="0" dirty="0">
+                <a:solidFill>
+                  <a:srgbClr val="55677A"/>
+                </a:solidFill>
+                <a:latin typeface="Arial"/>
+              </a:rPr>
+              <a:t> Namen.</a:t>
             </a:r>
           </a:p>
         </p:txBody>
@@ -13802,13 +14587,229 @@
               </a:lnSpc>
             </a:pPr>
             <a:r>
-              <a:rPr sz="1200" b="0">
-                <a:solidFill>
-                  <a:srgbClr val="55677A"/>
-                </a:solidFill>
-                <a:latin typeface="Arial"/>
-              </a:rPr>
-              <a:t>Die Prüfung gegen den Beteiligungsbericht ist erfolgt, die Fundstellen sind nicht je Zeile mitgeschrieben. Für eine Veröffentlichung wäre das nachzuholen.</a:t>
+              <a:rPr sz="1200" b="0" dirty="0">
+                <a:solidFill>
+                  <a:srgbClr val="55677A"/>
+                </a:solidFill>
+                <a:latin typeface="Arial"/>
+              </a:rPr>
+              <a:t>Die </a:t>
+            </a:r>
+            <a:r>
+              <a:rPr sz="1200" b="0" dirty="0" err="1">
+                <a:solidFill>
+                  <a:srgbClr val="55677A"/>
+                </a:solidFill>
+                <a:latin typeface="Arial"/>
+              </a:rPr>
+              <a:t>Prüfung</a:t>
+            </a:r>
+            <a:r>
+              <a:rPr sz="1200" b="0" dirty="0">
+                <a:solidFill>
+                  <a:srgbClr val="55677A"/>
+                </a:solidFill>
+                <a:latin typeface="Arial"/>
+              </a:rPr>
+              <a:t> </a:t>
+            </a:r>
+            <a:r>
+              <a:rPr sz="1200" b="0" dirty="0" err="1">
+                <a:solidFill>
+                  <a:srgbClr val="55677A"/>
+                </a:solidFill>
+                <a:latin typeface="Arial"/>
+              </a:rPr>
+              <a:t>gegen</a:t>
+            </a:r>
+            <a:r>
+              <a:rPr sz="1200" b="0" dirty="0">
+                <a:solidFill>
+                  <a:srgbClr val="55677A"/>
+                </a:solidFill>
+                <a:latin typeface="Arial"/>
+              </a:rPr>
+              <a:t> den </a:t>
+            </a:r>
+            <a:r>
+              <a:rPr sz="1200" b="0" dirty="0" err="1">
+                <a:solidFill>
+                  <a:srgbClr val="55677A"/>
+                </a:solidFill>
+                <a:latin typeface="Arial"/>
+              </a:rPr>
+              <a:t>Beteiligungsbericht</a:t>
+            </a:r>
+            <a:r>
+              <a:rPr sz="1200" b="0" dirty="0">
+                <a:solidFill>
+                  <a:srgbClr val="55677A"/>
+                </a:solidFill>
+                <a:latin typeface="Arial"/>
+              </a:rPr>
+              <a:t> </a:t>
+            </a:r>
+            <a:r>
+              <a:rPr sz="1200" b="0" dirty="0" err="1">
+                <a:solidFill>
+                  <a:srgbClr val="55677A"/>
+                </a:solidFill>
+                <a:latin typeface="Arial"/>
+              </a:rPr>
+              <a:t>ist</a:t>
+            </a:r>
+            <a:r>
+              <a:rPr sz="1200" b="0" dirty="0">
+                <a:solidFill>
+                  <a:srgbClr val="55677A"/>
+                </a:solidFill>
+                <a:latin typeface="Arial"/>
+              </a:rPr>
+              <a:t> </a:t>
+            </a:r>
+            <a:r>
+              <a:rPr sz="1200" b="0" dirty="0" err="1">
+                <a:solidFill>
+                  <a:srgbClr val="55677A"/>
+                </a:solidFill>
+                <a:latin typeface="Arial"/>
+              </a:rPr>
+              <a:t>erfolgt</a:t>
+            </a:r>
+            <a:r>
+              <a:rPr sz="1200" b="0" dirty="0">
+                <a:solidFill>
+                  <a:srgbClr val="55677A"/>
+                </a:solidFill>
+                <a:latin typeface="Arial"/>
+              </a:rPr>
+              <a:t>, die </a:t>
+            </a:r>
+            <a:r>
+              <a:rPr sz="1200" b="0" dirty="0" err="1">
+                <a:solidFill>
+                  <a:srgbClr val="55677A"/>
+                </a:solidFill>
+                <a:latin typeface="Arial"/>
+              </a:rPr>
+              <a:t>Fundstellen</a:t>
+            </a:r>
+            <a:r>
+              <a:rPr sz="1200" b="0" dirty="0">
+                <a:solidFill>
+                  <a:srgbClr val="55677A"/>
+                </a:solidFill>
+                <a:latin typeface="Arial"/>
+              </a:rPr>
+              <a:t> </a:t>
+            </a:r>
+            <a:r>
+              <a:rPr sz="1200" b="0" dirty="0" err="1">
+                <a:solidFill>
+                  <a:srgbClr val="55677A"/>
+                </a:solidFill>
+                <a:latin typeface="Arial"/>
+              </a:rPr>
+              <a:t>sind</a:t>
+            </a:r>
+            <a:r>
+              <a:rPr sz="1200" b="0" dirty="0">
+                <a:solidFill>
+                  <a:srgbClr val="55677A"/>
+                </a:solidFill>
+                <a:latin typeface="Arial"/>
+              </a:rPr>
+              <a:t> nicht je Zeile </a:t>
+            </a:r>
+            <a:r>
+              <a:rPr sz="1200" b="0" dirty="0" err="1">
+                <a:solidFill>
+                  <a:srgbClr val="55677A"/>
+                </a:solidFill>
+                <a:latin typeface="Arial"/>
+              </a:rPr>
+              <a:t>mitgeschrieben</a:t>
+            </a:r>
+            <a:r>
+              <a:rPr sz="1200" b="0" dirty="0">
+                <a:solidFill>
+                  <a:srgbClr val="55677A"/>
+                </a:solidFill>
+                <a:latin typeface="Arial"/>
+              </a:rPr>
+              <a:t>. Für </a:t>
+            </a:r>
+            <a:r>
+              <a:rPr sz="1200" b="0" dirty="0" err="1">
+                <a:solidFill>
+                  <a:srgbClr val="55677A"/>
+                </a:solidFill>
+                <a:latin typeface="Arial"/>
+              </a:rPr>
+              <a:t>eine</a:t>
+            </a:r>
+            <a:r>
+              <a:rPr sz="1200" b="0" dirty="0">
+                <a:solidFill>
+                  <a:srgbClr val="55677A"/>
+                </a:solidFill>
+                <a:latin typeface="Arial"/>
+              </a:rPr>
+              <a:t> </a:t>
+            </a:r>
+            <a:r>
+              <a:rPr sz="1200" b="0" dirty="0" err="1">
+                <a:solidFill>
+                  <a:srgbClr val="55677A"/>
+                </a:solidFill>
+                <a:latin typeface="Arial"/>
+              </a:rPr>
+              <a:t>Veröffentlichung</a:t>
+            </a:r>
+            <a:r>
+              <a:rPr sz="1200" b="0" dirty="0">
+                <a:solidFill>
+                  <a:srgbClr val="55677A"/>
+                </a:solidFill>
+                <a:latin typeface="Arial"/>
+              </a:rPr>
+              <a:t> </a:t>
+            </a:r>
+            <a:r>
+              <a:rPr sz="1200" b="0" dirty="0" err="1">
+                <a:solidFill>
+                  <a:srgbClr val="55677A"/>
+                </a:solidFill>
+                <a:latin typeface="Arial"/>
+              </a:rPr>
+              <a:t>wäre</a:t>
+            </a:r>
+            <a:r>
+              <a:rPr sz="1200" b="0" dirty="0">
+                <a:solidFill>
+                  <a:srgbClr val="55677A"/>
+                </a:solidFill>
+                <a:latin typeface="Arial"/>
+              </a:rPr>
+              <a:t> das </a:t>
+            </a:r>
+            <a:r>
+              <a:rPr sz="1200" b="0" dirty="0" err="1">
+                <a:solidFill>
+                  <a:srgbClr val="55677A"/>
+                </a:solidFill>
+                <a:latin typeface="Arial"/>
+              </a:rPr>
+              <a:t>nachzuholen</a:t>
+            </a:r>
+            <a:r>
+              <a:rPr sz="1200" b="0" dirty="0">
+                <a:solidFill>
+                  <a:srgbClr val="55677A"/>
+                </a:solidFill>
+                <a:latin typeface="Arial"/>
+              </a:rPr>
+              <a:t>.</a:t>
             </a:r>
           </a:p>
         </p:txBody>
@@ -15372,8 +16373,8 @@
         </p:nvSpPr>
         <p:spPr>
           <a:xfrm>
-            <a:off x="640080" y="2377440"/>
-            <a:ext cx="1097280" cy="36000"/>
+            <a:off x="0" y="0"/>
+            <a:ext cx="320040" cy="6858000"/>
           </a:xfrm>
           <a:prstGeom prst="rect">
             <a:avLst/>
@@ -15417,8 +16418,8 @@
         </p:nvSpPr>
         <p:spPr>
           <a:xfrm>
-            <a:off x="640080" y="2606040"/>
-            <a:ext cx="10911535" cy="457200"/>
+            <a:off x="640080" y="1280160"/>
+            <a:ext cx="10515600" cy="1463040"/>
           </a:xfrm>
           <a:prstGeom prst="rect">
             <a:avLst/>
@@ -15437,13 +16438,13 @@
               </a:lnSpc>
             </a:pPr>
             <a:r>
-              <a:rPr sz="1400" b="1">
-                <a:solidFill>
-                  <a:srgbClr val="F6F7F8"/>
-                </a:solidFill>
-                <a:latin typeface="Arial"/>
-              </a:rPr>
-              <a:t>TEIL 3</a:t>
+              <a:rPr sz="3400" b="1">
+                <a:solidFill>
+                  <a:srgbClr val="FFFFFF"/>
+                </a:solidFill>
+                <a:latin typeface="Arial"/>
+              </a:rPr>
+              <a:t>Ein Befund pro Kachel. Der Weg dahin im Repo.</a:t>
             </a:r>
           </a:p>
         </p:txBody>
@@ -15456,8 +16457,8 @@
         </p:nvSpPr>
         <p:spPr>
           <a:xfrm>
-            <a:off x="640080" y="3017520"/>
-            <a:ext cx="10911535" cy="1463040"/>
+            <a:off x="640080" y="2880360"/>
+            <a:ext cx="10058400" cy="731520"/>
           </a:xfrm>
           <a:prstGeom prst="rect">
             <a:avLst/>
@@ -15476,13 +16477,13 @@
               </a:lnSpc>
             </a:pPr>
             <a:r>
-              <a:rPr sz="3600" b="1">
-                <a:solidFill>
-                  <a:srgbClr val="FFFFFF"/>
-                </a:solidFill>
-                <a:latin typeface="Arial"/>
-              </a:rPr>
-              <a:t>Der Ausblick: von der Handarbeit zur Pipeline</a:t>
+              <a:rPr sz="2200" b="0">
+                <a:solidFill>
+                  <a:srgbClr val="F6F7F8"/>
+                </a:solidFill>
+                <a:latin typeface="Arial"/>
+              </a:rPr>
+              <a:t>Danke. Fragen?</a:t>
             </a:r>
           </a:p>
         </p:txBody>
@@ -15495,8 +16496,8 @@
         </p:nvSpPr>
         <p:spPr>
           <a:xfrm>
-            <a:off x="640080" y="4572000"/>
-            <a:ext cx="9144000" cy="914400"/>
+            <a:off x="640080" y="3931920"/>
+            <a:ext cx="10515600" cy="2286000"/>
           </a:xfrm>
           <a:prstGeom prst="rect">
             <a:avLst/>
@@ -15515,38 +16516,15 @@
               </a:lnSpc>
             </a:pPr>
             <a:r>
-              <a:rPr sz="1800" b="0">
+              <a:rPr sz="1100" b="1">
                 <a:solidFill>
                   <a:srgbClr val="F6F7F8"/>
                 </a:solidFill>
                 <a:latin typeface="Arial"/>
               </a:rPr>
-              <a:t>Was ich hier einmal von Hand gemacht habe, soll für amtliche Statistik automatisch laufen. Mit Freigabe durch einen Menschen.</a:t>
-            </a:r>
-          </a:p>
-        </p:txBody>
-      </p:sp>
-      <p:sp>
-        <p:nvSpPr>
-          <p:cNvPr id="6" name="TextBox 5"/>
-          <p:cNvSpPr txBox="1"/>
-          <p:nvPr/>
-        </p:nvSpPr>
-        <p:spPr>
-          <a:xfrm>
-            <a:off x="640080" y="6400800"/>
-            <a:ext cx="7315200" cy="274320"/>
-          </a:xfrm>
-          <a:prstGeom prst="rect">
-            <a:avLst/>
-          </a:prstGeom>
-          <a:noFill/>
-        </p:spPr>
-        <p:txBody>
-          <a:bodyPr wrap="square" lIns="45720" tIns="27432" rIns="45720" bIns="27432" anchor="t">
-            <a:spAutoFit/>
-          </a:bodyPr>
-          <a:lstStyle/>
+              <a:t>CODE UND DOKUMENTATION</a:t>
+            </a:r>
+          </a:p>
           <a:p>
             <a:pPr algn="l">
               <a:lnSpc>
@@ -15554,6 +16532,80 @@
               </a:lnSpc>
             </a:pPr>
             <a:r>
+              <a:rPr sz="1600" b="0">
+                <a:solidFill>
+                  <a:srgbClr val="FFFFFF"/>
+                </a:solidFill>
+                <a:latin typeface="Arial"/>
+              </a:rPr>
+              <a:t>github.com/Coco1606/hamburg-in-zahlen-manuell</a:t>
+            </a:r>
+          </a:p>
+          <a:p>
+            <a:pPr algn="l">
+              <a:lnSpc>
+                <a:spcPct val="115000"/>
+              </a:lnSpc>
+              <a:spcBef>
+                <a:spcPts val="1400"/>
+              </a:spcBef>
+            </a:pPr>
+            <a:r>
+              <a:rPr sz="1100" b="1">
+                <a:solidFill>
+                  <a:srgbClr val="F6F7F8"/>
+                </a:solidFill>
+                <a:latin typeface="Arial"/>
+              </a:rPr>
+              <a:t>QUELLEN</a:t>
+            </a:r>
+          </a:p>
+          <a:p>
+            <a:pPr algn="l">
+              <a:lnSpc>
+                <a:spcPct val="115000"/>
+              </a:lnSpc>
+            </a:pPr>
+            <a:r>
+              <a:rPr sz="1100" b="0">
+                <a:solidFill>
+                  <a:srgbClr val="F6F7F8"/>
+                </a:solidFill>
+                <a:latin typeface="Arial"/>
+              </a:rPr>
+              <a:t>Transparenzportal Hamburg, Zuwendungsvorgänge (INEZ), Stand Jahresende 2025 · Bürgerschaft der FHH, Drs. 20/9850 (05.11.2013) · Antwort der Finanzbehörde auf die FragDenStaat-Anfrage „Zuwendungsberichte ab 2014“ · Beteiligungsbericht der FHH · restatis (CorrelAid), SciCAR26-Workshopcode (Destatis)</a:t>
+            </a:r>
+          </a:p>
+        </p:txBody>
+      </p:sp>
+      <p:sp>
+        <p:nvSpPr>
+          <p:cNvPr id="6" name="TextBox 5"/>
+          <p:cNvSpPr txBox="1"/>
+          <p:nvPr/>
+        </p:nvSpPr>
+        <p:spPr>
+          <a:xfrm>
+            <a:off x="640080" y="6400800"/>
+            <a:ext cx="7315200" cy="274320"/>
+          </a:xfrm>
+          <a:prstGeom prst="rect">
+            <a:avLst/>
+          </a:prstGeom>
+          <a:noFill/>
+        </p:spPr>
+        <p:txBody>
+          <a:bodyPr wrap="square" lIns="45720" tIns="27432" rIns="45720" bIns="27432" anchor="t">
+            <a:spAutoFit/>
+          </a:bodyPr>
+          <a:lstStyle/>
+          <a:p>
+            <a:pPr algn="l">
+              <a:lnSpc>
+                <a:spcPct val="115000"/>
+              </a:lnSpc>
+            </a:pPr>
+            <a:r>
               <a:rPr sz="900" b="0">
                 <a:solidFill>
                   <a:srgbClr val="F6F7F8"/>
@@ -15599,7 +16651,7 @@
                 </a:solidFill>
                 <a:latin typeface="Arial"/>
               </a:rPr>
-              <a:t>20</a:t>
+              <a:t>24</a:t>
             </a:r>
           </a:p>
         </p:txBody>
@@ -15613,6 +16665,96 @@
 </file>
 
 <file path=ppt/slides/slide21.xml><?xml version="1.0" encoding="utf-8"?>
+<p:sld xmlns:a="http://schemas.openxmlformats.org/drawingml/2006/main" xmlns:r="http://schemas.openxmlformats.org/officeDocument/2006/relationships" xmlns:p="http://schemas.openxmlformats.org/presentationml/2006/main">
+  <p:cSld>
+    <p:spTree>
+      <p:nvGrpSpPr>
+        <p:cNvPr id="1" name=""/>
+        <p:cNvGrpSpPr/>
+        <p:nvPr/>
+      </p:nvGrpSpPr>
+      <p:grpSpPr>
+        <a:xfrm>
+          <a:off x="0" y="0"/>
+          <a:ext cx="0" cy="0"/>
+          <a:chOff x="0" y="0"/>
+          <a:chExt cx="0" cy="0"/>
+        </a:xfrm>
+      </p:grpSpPr>
+    </p:spTree>
+    <p:extLst>
+      <p:ext uri="{BB962C8B-B14F-4D97-AF65-F5344CB8AC3E}">
+        <p14:creationId xmlns:p14="http://schemas.microsoft.com/office/powerpoint/2010/main" val="4032586884"/>
+      </p:ext>
+    </p:extLst>
+  </p:cSld>
+  <p:clrMapOvr>
+    <a:masterClrMapping/>
+  </p:clrMapOvr>
+</p:sld>
+</file>
+
+<file path=ppt/slides/slide22.xml><?xml version="1.0" encoding="utf-8"?>
+<p:sld xmlns:a="http://schemas.openxmlformats.org/drawingml/2006/main" xmlns:r="http://schemas.openxmlformats.org/officeDocument/2006/relationships" xmlns:p="http://schemas.openxmlformats.org/presentationml/2006/main">
+  <p:cSld>
+    <p:spTree>
+      <p:nvGrpSpPr>
+        <p:cNvPr id="1" name=""/>
+        <p:cNvGrpSpPr/>
+        <p:nvPr/>
+      </p:nvGrpSpPr>
+      <p:grpSpPr>
+        <a:xfrm>
+          <a:off x="0" y="0"/>
+          <a:ext cx="0" cy="0"/>
+          <a:chOff x="0" y="0"/>
+          <a:chExt cx="0" cy="0"/>
+        </a:xfrm>
+      </p:grpSpPr>
+    </p:spTree>
+    <p:extLst>
+      <p:ext uri="{BB962C8B-B14F-4D97-AF65-F5344CB8AC3E}">
+        <p14:creationId xmlns:p14="http://schemas.microsoft.com/office/powerpoint/2010/main" val="1721959230"/>
+      </p:ext>
+    </p:extLst>
+  </p:cSld>
+  <p:clrMapOvr>
+    <a:masterClrMapping/>
+  </p:clrMapOvr>
+</p:sld>
+</file>
+
+<file path=ppt/slides/slide23.xml><?xml version="1.0" encoding="utf-8"?>
+<p:sld xmlns:a="http://schemas.openxmlformats.org/drawingml/2006/main" xmlns:r="http://schemas.openxmlformats.org/officeDocument/2006/relationships" xmlns:p="http://schemas.openxmlformats.org/presentationml/2006/main">
+  <p:cSld>
+    <p:spTree>
+      <p:nvGrpSpPr>
+        <p:cNvPr id="1" name=""/>
+        <p:cNvGrpSpPr/>
+        <p:nvPr/>
+      </p:nvGrpSpPr>
+      <p:grpSpPr>
+        <a:xfrm>
+          <a:off x="0" y="0"/>
+          <a:ext cx="0" cy="0"/>
+          <a:chOff x="0" y="0"/>
+          <a:chExt cx="0" cy="0"/>
+        </a:xfrm>
+      </p:grpSpPr>
+    </p:spTree>
+    <p:extLst>
+      <p:ext uri="{BB962C8B-B14F-4D97-AF65-F5344CB8AC3E}">
+        <p14:creationId xmlns:p14="http://schemas.microsoft.com/office/powerpoint/2010/main" val="279036240"/>
+      </p:ext>
+    </p:extLst>
+  </p:cSld>
+  <p:clrMapOvr>
+    <a:masterClrMapping/>
+  </p:clrMapOvr>
+</p:sld>
+</file>
+
+<file path=ppt/slides/slide24.xml><?xml version="1.0" encoding="utf-8"?>
 <p:sld xmlns:a="http://schemas.openxmlformats.org/drawingml/2006/main" xmlns:r="http://schemas.openxmlformats.org/officeDocument/2006/relationships" xmlns:p="http://schemas.openxmlformats.org/presentationml/2006/main">
   <p:cSld>
     <p:bg>
@@ -16737,7 +17879,7 @@
 </p:sld>
 </file>
 
-<file path=ppt/slides/slide22.xml><?xml version="1.0" encoding="utf-8"?>
+<file path=ppt/slides/slide25.xml><?xml version="1.0" encoding="utf-8"?>
 <p:sld xmlns:a="http://schemas.openxmlformats.org/drawingml/2006/main" xmlns:r="http://schemas.openxmlformats.org/officeDocument/2006/relationships" xmlns:p="http://schemas.openxmlformats.org/presentationml/2006/main">
   <p:cSld>
     <p:bg>
@@ -17482,7 +18624,7 @@
 </p:sld>
 </file>
 
-<file path=ppt/slides/slide23.xml><?xml version="1.0" encoding="utf-8"?>
+<file path=ppt/slides/slide26.xml><?xml version="1.0" encoding="utf-8"?>
 <p:sld xmlns:a="http://schemas.openxmlformats.org/drawingml/2006/main" xmlns:r="http://schemas.openxmlformats.org/officeDocument/2006/relationships" xmlns:p="http://schemas.openxmlformats.org/presentationml/2006/main">
   <p:cSld>
     <p:bg>
@@ -18703,330 +19845,6 @@
                 <a:latin typeface="Arial"/>
               </a:rPr>
               <a:t>23</a:t>
-            </a:r>
-          </a:p>
-        </p:txBody>
-      </p:sp>
-    </p:spTree>
-  </p:cSld>
-  <p:clrMapOvr>
-    <a:masterClrMapping/>
-  </p:clrMapOvr>
-</p:sld>
-</file>
-
-<file path=ppt/slides/slide24.xml><?xml version="1.0" encoding="utf-8"?>
-<p:sld xmlns:a="http://schemas.openxmlformats.org/drawingml/2006/main" xmlns:r="http://schemas.openxmlformats.org/officeDocument/2006/relationships" xmlns:p="http://schemas.openxmlformats.org/presentationml/2006/main">
-  <p:cSld>
-    <p:bg>
-      <p:bgPr>
-        <a:solidFill>
-          <a:srgbClr val="16202A"/>
-        </a:solidFill>
-        <a:effectLst/>
-      </p:bgPr>
-    </p:bg>
-    <p:spTree>
-      <p:nvGrpSpPr>
-        <p:cNvPr id="1" name=""/>
-        <p:cNvGrpSpPr/>
-        <p:nvPr/>
-      </p:nvGrpSpPr>
-      <p:grpSpPr>
-        <a:xfrm>
-          <a:off x="0" y="0"/>
-          <a:ext cx="0" cy="0"/>
-          <a:chOff x="0" y="0"/>
-          <a:chExt cx="0" cy="0"/>
-        </a:xfrm>
-      </p:grpSpPr>
-      <p:sp>
-        <p:nvSpPr>
-          <p:cNvPr id="2" name="Rectangle 1"/>
-          <p:cNvSpPr/>
-          <p:nvPr/>
-        </p:nvSpPr>
-        <p:spPr>
-          <a:xfrm>
-            <a:off x="0" y="0"/>
-            <a:ext cx="320040" cy="6858000"/>
-          </a:xfrm>
-          <a:prstGeom prst="rect">
-            <a:avLst/>
-          </a:prstGeom>
-          <a:solidFill>
-            <a:srgbClr val="0A5C6E"/>
-          </a:solidFill>
-          <a:ln>
-            <a:noFill/>
-          </a:ln>
-          <a:effectLst/>
-        </p:spPr>
-        <p:style>
-          <a:lnRef idx="1">
-            <a:schemeClr val="accent1"/>
-          </a:lnRef>
-          <a:fillRef idx="3">
-            <a:schemeClr val="accent1"/>
-          </a:fillRef>
-          <a:effectRef idx="2">
-            <a:schemeClr val="accent1"/>
-          </a:effectRef>
-          <a:fontRef idx="minor">
-            <a:schemeClr val="lt1"/>
-          </a:fontRef>
-        </p:style>
-        <p:txBody>
-          <a:bodyPr rtlCol="0" anchor="ctr"/>
-          <a:lstStyle/>
-          <a:p>
-            <a:pPr algn="ctr"/>
-            <a:endParaRPr/>
-          </a:p>
-        </p:txBody>
-      </p:sp>
-      <p:sp>
-        <p:nvSpPr>
-          <p:cNvPr id="3" name="TextBox 2"/>
-          <p:cNvSpPr txBox="1"/>
-          <p:nvPr/>
-        </p:nvSpPr>
-        <p:spPr>
-          <a:xfrm>
-            <a:off x="640080" y="1280160"/>
-            <a:ext cx="10515600" cy="1463040"/>
-          </a:xfrm>
-          <a:prstGeom prst="rect">
-            <a:avLst/>
-          </a:prstGeom>
-          <a:noFill/>
-        </p:spPr>
-        <p:txBody>
-          <a:bodyPr wrap="square" lIns="45720" tIns="27432" rIns="45720" bIns="27432" anchor="t">
-            <a:spAutoFit/>
-          </a:bodyPr>
-          <a:lstStyle/>
-          <a:p>
-            <a:pPr algn="l">
-              <a:lnSpc>
-                <a:spcPct val="115000"/>
-              </a:lnSpc>
-            </a:pPr>
-            <a:r>
-              <a:rPr sz="3400" b="1">
-                <a:solidFill>
-                  <a:srgbClr val="FFFFFF"/>
-                </a:solidFill>
-                <a:latin typeface="Arial"/>
-              </a:rPr>
-              <a:t>Ein Befund pro Kachel. Der Weg dahin im Repo.</a:t>
-            </a:r>
-          </a:p>
-        </p:txBody>
-      </p:sp>
-      <p:sp>
-        <p:nvSpPr>
-          <p:cNvPr id="4" name="TextBox 3"/>
-          <p:cNvSpPr txBox="1"/>
-          <p:nvPr/>
-        </p:nvSpPr>
-        <p:spPr>
-          <a:xfrm>
-            <a:off x="640080" y="2880360"/>
-            <a:ext cx="10058400" cy="731520"/>
-          </a:xfrm>
-          <a:prstGeom prst="rect">
-            <a:avLst/>
-          </a:prstGeom>
-          <a:noFill/>
-        </p:spPr>
-        <p:txBody>
-          <a:bodyPr wrap="square" lIns="45720" tIns="27432" rIns="45720" bIns="27432" anchor="t">
-            <a:spAutoFit/>
-          </a:bodyPr>
-          <a:lstStyle/>
-          <a:p>
-            <a:pPr algn="l">
-              <a:lnSpc>
-                <a:spcPct val="115000"/>
-              </a:lnSpc>
-            </a:pPr>
-            <a:r>
-              <a:rPr sz="2200" b="0">
-                <a:solidFill>
-                  <a:srgbClr val="F6F7F8"/>
-                </a:solidFill>
-                <a:latin typeface="Arial"/>
-              </a:rPr>
-              <a:t>Danke. Fragen?</a:t>
-            </a:r>
-          </a:p>
-        </p:txBody>
-      </p:sp>
-      <p:sp>
-        <p:nvSpPr>
-          <p:cNvPr id="5" name="TextBox 4"/>
-          <p:cNvSpPr txBox="1"/>
-          <p:nvPr/>
-        </p:nvSpPr>
-        <p:spPr>
-          <a:xfrm>
-            <a:off x="640080" y="3931920"/>
-            <a:ext cx="10515600" cy="2286000"/>
-          </a:xfrm>
-          <a:prstGeom prst="rect">
-            <a:avLst/>
-          </a:prstGeom>
-          <a:noFill/>
-        </p:spPr>
-        <p:txBody>
-          <a:bodyPr wrap="square" lIns="45720" tIns="27432" rIns="45720" bIns="27432" anchor="t">
-            <a:spAutoFit/>
-          </a:bodyPr>
-          <a:lstStyle/>
-          <a:p>
-            <a:pPr algn="l">
-              <a:lnSpc>
-                <a:spcPct val="115000"/>
-              </a:lnSpc>
-            </a:pPr>
-            <a:r>
-              <a:rPr sz="1100" b="1">
-                <a:solidFill>
-                  <a:srgbClr val="F6F7F8"/>
-                </a:solidFill>
-                <a:latin typeface="Arial"/>
-              </a:rPr>
-              <a:t>CODE UND DOKUMENTATION</a:t>
-            </a:r>
-          </a:p>
-          <a:p>
-            <a:pPr algn="l">
-              <a:lnSpc>
-                <a:spcPct val="115000"/>
-              </a:lnSpc>
-            </a:pPr>
-            <a:r>
-              <a:rPr sz="1600" b="0">
-                <a:solidFill>
-                  <a:srgbClr val="FFFFFF"/>
-                </a:solidFill>
-                <a:latin typeface="Arial"/>
-              </a:rPr>
-              <a:t>github.com/Coco1606/hamburg-in-zahlen-manuell</a:t>
-            </a:r>
-          </a:p>
-          <a:p>
-            <a:pPr algn="l">
-              <a:lnSpc>
-                <a:spcPct val="115000"/>
-              </a:lnSpc>
-              <a:spcBef>
-                <a:spcPts val="1400"/>
-              </a:spcBef>
-            </a:pPr>
-            <a:r>
-              <a:rPr sz="1100" b="1">
-                <a:solidFill>
-                  <a:srgbClr val="F6F7F8"/>
-                </a:solidFill>
-                <a:latin typeface="Arial"/>
-              </a:rPr>
-              <a:t>QUELLEN</a:t>
-            </a:r>
-          </a:p>
-          <a:p>
-            <a:pPr algn="l">
-              <a:lnSpc>
-                <a:spcPct val="115000"/>
-              </a:lnSpc>
-            </a:pPr>
-            <a:r>
-              <a:rPr sz="1100" b="0">
-                <a:solidFill>
-                  <a:srgbClr val="F6F7F8"/>
-                </a:solidFill>
-                <a:latin typeface="Arial"/>
-              </a:rPr>
-              <a:t>Transparenzportal Hamburg, Zuwendungsvorgänge (INEZ), Stand Jahresende 2025 · Bürgerschaft der FHH, Drs. 20/9850 (05.11.2013) · Antwort der Finanzbehörde auf die FragDenStaat-Anfrage „Zuwendungsberichte ab 2014“ · Beteiligungsbericht der FHH · restatis (CorrelAid), SciCAR26-Workshopcode (Destatis)</a:t>
-            </a:r>
-          </a:p>
-        </p:txBody>
-      </p:sp>
-      <p:sp>
-        <p:nvSpPr>
-          <p:cNvPr id="6" name="TextBox 5"/>
-          <p:cNvSpPr txBox="1"/>
-          <p:nvPr/>
-        </p:nvSpPr>
-        <p:spPr>
-          <a:xfrm>
-            <a:off x="640080" y="6400800"/>
-            <a:ext cx="7315200" cy="274320"/>
-          </a:xfrm>
-          <a:prstGeom prst="rect">
-            <a:avLst/>
-          </a:prstGeom>
-          <a:noFill/>
-        </p:spPr>
-        <p:txBody>
-          <a:bodyPr wrap="square" lIns="45720" tIns="27432" rIns="45720" bIns="27432" anchor="t">
-            <a:spAutoFit/>
-          </a:bodyPr>
-          <a:lstStyle/>
-          <a:p>
-            <a:pPr algn="l">
-              <a:lnSpc>
-                <a:spcPct val="115000"/>
-              </a:lnSpc>
-            </a:pPr>
-            <a:r>
-              <a:rPr sz="900" b="0">
-                <a:solidFill>
-                  <a:srgbClr val="F6F7F8"/>
-                </a:solidFill>
-                <a:latin typeface="Arial"/>
-              </a:rPr>
-              <a:t>Hamburg in Zahlen · Portfolio-Projekt · Constanze Thönnessen · 11.09.2026</a:t>
-            </a:r>
-          </a:p>
-        </p:txBody>
-      </p:sp>
-      <p:sp>
-        <p:nvSpPr>
-          <p:cNvPr id="7" name="TextBox 6"/>
-          <p:cNvSpPr txBox="1"/>
-          <p:nvPr/>
-        </p:nvSpPr>
-        <p:spPr>
-          <a:xfrm>
-            <a:off x="10637215" y="6400800"/>
-            <a:ext cx="914400" cy="274320"/>
-          </a:xfrm>
-          <a:prstGeom prst="rect">
-            <a:avLst/>
-          </a:prstGeom>
-          <a:noFill/>
-        </p:spPr>
-        <p:txBody>
-          <a:bodyPr wrap="square" lIns="45720" tIns="27432" rIns="45720" bIns="27432" anchor="t">
-            <a:spAutoFit/>
-          </a:bodyPr>
-          <a:lstStyle/>
-          <a:p>
-            <a:pPr algn="r">
-              <a:lnSpc>
-                <a:spcPct val="115000"/>
-              </a:lnSpc>
-            </a:pPr>
-            <a:r>
-              <a:rPr sz="900" b="0">
-                <a:solidFill>
-                  <a:srgbClr val="F6F7F8"/>
-                </a:solidFill>
-                <a:latin typeface="Arial"/>
-              </a:rPr>
-              <a:t>24</a:t>
             </a:r>
           </a:p>
         </p:txBody>
